--- a/output/05-security-privacy/05-02-phishing-and-social-engineering.pptx
+++ b/output/05-security-privacy/05-02-phishing-and-social-engineering.pptx
@@ -29473,7 +29473,7 @@
                 </a:solidFill>
                 <a:latin typeface="Segoe UI"/>
               </a:rPr>
-              <a:t>Any two pressure signals together.</a:t>
+              <a:t>Signals combine easily — but one alone is reason enough to check.</a:t>
             </a:r>
           </a:p>
         </p:txBody>
@@ -32116,7 +32116,7 @@
                 </a:solidFill>
                 <a:latin typeface="Segoe UI"/>
               </a:rPr>
-              <a:t>Any two pressure signals together.</a:t>
+              <a:t>Signals combine easily — but one alone is reason enough to check.</a:t>
             </a:r>
           </a:p>
         </p:txBody>
@@ -33023,7 +33023,7 @@
                 </a:solidFill>
                 <a:latin typeface="Segoe UI"/>
               </a:rPr>
-              <a:t>Any two pressure signals together.</a:t>
+              <a:t>Signals combine easily — but one alone is reason enough to check.</a:t>
             </a:r>
           </a:p>
         </p:txBody>
@@ -33930,7 +33930,7 @@
                 </a:solidFill>
                 <a:latin typeface="Segoe UI"/>
               </a:rPr>
-              <a:t>Any two pressure signals together.</a:t>
+              <a:t>Signals combine easily — but one alone is reason enough to check.</a:t>
             </a:r>
           </a:p>
         </p:txBody>
@@ -35355,7 +35355,7 @@
                 </a:solidFill>
                 <a:latin typeface="Segoe UI"/>
               </a:rPr>
-              <a:t>Nobody, ever, under any circumstances</a:t>
+              <a:t>Nobody — not IT, your bank, or your manager</a:t>
             </a:r>
           </a:p>
         </p:txBody>
@@ -36844,7 +36844,7 @@
                 </a:solidFill>
                 <a:latin typeface="Segoe UI Semibold"/>
               </a:rPr>
-              <a:t>YOU CHOSE  B.  Nobody, ever, under any circumstances</a:t>
+              <a:t>YOU CHOSE  B.  Nobody — not IT, your bank, or your manager</a:t>
             </a:r>
           </a:p>
         </p:txBody>
@@ -52992,7 +52992,7 @@
                 </a:solidFill>
                 <a:latin typeface="Segoe UI"/>
               </a:rPr>
-              <a:t>Urgency, authority, secrecy, a change. Any two means stop.</a:t>
+              <a:t>Urgency, authority, secrecy, a change. One alone is reason enough to verify.</a:t>
             </a:r>
           </a:p>
         </p:txBody>
@@ -63091,7 +63091,7 @@
                 </a:solidFill>
                 <a:latin typeface="Segoe UI Semibold"/>
               </a:rPr>
-              <a:t>Two together is enough to stop</a:t>
+              <a:t>One is enough to make you check</a:t>
             </a:r>
           </a:p>
         </p:txBody>
@@ -63643,12 +63643,39 @@
         </p:nvSpPr>
         <p:spPr>
           <a:xfrm>
-            <a:off x="955789" y="2190229"/>
-            <a:ext cx="301269" cy="301269"/>
-          </a:xfrm>
-          <a:prstGeom prst="ellipse">
-            <a:avLst/>
-          </a:prstGeom>
+            <a:off x="959212" y="2186805"/>
+            <a:ext cx="294423" cy="308117"/>
+          </a:xfrm>
+          <a:custGeom>
+            <a:avLst/>
+            <a:gdLst/>
+            <a:ahLst/>
+            <a:cxnLst/>
+            <a:rect l="l" t="t" r="r" b="b"/>
+            <a:pathLst>
+              <a:path w="294423" h="308117">
+                <a:moveTo>
+                  <a:pt x="147212" y="0"/>
+                </a:moveTo>
+                <a:lnTo>
+                  <a:pt x="294423" y="65047"/>
+                </a:lnTo>
+                <a:lnTo>
+                  <a:pt x="270458" y="222529"/>
+                </a:lnTo>
+                <a:lnTo>
+                  <a:pt x="147212" y="308117"/>
+                </a:lnTo>
+                <a:lnTo>
+                  <a:pt x="23965" y="222529"/>
+                </a:lnTo>
+                <a:lnTo>
+                  <a:pt x="0" y="65047"/>
+                </a:lnTo>
+                <a:close/>
+              </a:path>
+            </a:pathLst>
+          </a:custGeom>
           <a:noFill/>
           <a:ln w="19050">
             <a:solidFill>
@@ -63672,25 +63699,206 @@
           </a:fontRef>
         </p:style>
         <p:txBody>
+          <a:bodyPr rtlCol="0" anchor="ctr"/>
+          <a:lstStyle/>
+          <a:p>
+            <a:pPr algn="ctr"/>
+          </a:p>
+        </p:txBody>
+      </p:sp>
+      <p:sp>
+        <p:nvSpPr>
+          <p:cNvPr id="18" name="cell:tilelabel"/>
+          <p:cNvSpPr txBox="1"/>
+          <p:nvPr/>
+        </p:nvSpPr>
+        <p:spPr>
+          <a:xfrm>
+            <a:off x="777240" y="2852928"/>
+            <a:ext cx="2997098" cy="566928"/>
+          </a:xfrm>
+          <a:prstGeom prst="rect">
+            <a:avLst/>
+          </a:prstGeom>
+          <a:noFill/>
+        </p:spPr>
+        <p:txBody>
+          <a:bodyPr wrap="square" lIns="0" rIns="0" tIns="0" bIns="0" anchor="t">
+            <a:spAutoFit/>
+          </a:bodyPr>
+          <a:lstStyle/>
+          <a:p>
+            <a:pPr algn="l">
+              <a:lnSpc>
+                <a:spcPts val="2210"/>
+              </a:lnSpc>
+              <a:spcBef>
+                <a:spcPts val="0"/>
+              </a:spcBef>
+              <a:spcAft>
+                <a:spcPts val="0"/>
+              </a:spcAft>
+            </a:pPr>
+            <a:r>
+              <a:rPr sz="1700" b="0">
+                <a:solidFill>
+                  <a:srgbClr val="101826"/>
+                </a:solidFill>
+                <a:latin typeface="Segoe UI Semibold"/>
+              </a:rPr>
+              <a:t>A change, on its own, is reason enough</a:t>
+            </a:r>
+          </a:p>
+        </p:txBody>
+      </p:sp>
+      <p:sp>
+        <p:nvSpPr>
+          <p:cNvPr id="19" name="cell:tilesub"/>
+          <p:cNvSpPr txBox="1"/>
+          <p:nvPr/>
+        </p:nvSpPr>
+        <p:spPr>
+          <a:xfrm>
+            <a:off x="777240" y="3493008"/>
+            <a:ext cx="2997098" cy="914400"/>
+          </a:xfrm>
+          <a:prstGeom prst="rect">
+            <a:avLst/>
+          </a:prstGeom>
+          <a:noFill/>
+        </p:spPr>
+        <p:txBody>
+          <a:bodyPr wrap="square" lIns="0" rIns="0" tIns="0" bIns="0" anchor="t">
+            <a:spAutoFit/>
+          </a:bodyPr>
+          <a:lstStyle/>
+          <a:p>
+            <a:pPr algn="l">
+              <a:lnSpc>
+                <a:spcPts val="1690"/>
+              </a:lnSpc>
+              <a:spcBef>
+                <a:spcPts val="0"/>
+              </a:spcBef>
+              <a:spcAft>
+                <a:spcPts val="0"/>
+              </a:spcAft>
+            </a:pPr>
+            <a:r>
+              <a:rPr sz="1300" b="0">
+                <a:solidFill>
+                  <a:srgbClr val="5B6779"/>
+                </a:solidFill>
+                <a:latin typeface="Segoe UI"/>
+              </a:rPr>
+              <a:t>New bank details, a new process, a new address — verify that alone, even with no urgency and no pressure attached to it.</a:t>
+            </a:r>
+          </a:p>
+        </p:txBody>
+      </p:sp>
+      <p:sp>
+        <p:nvSpPr>
+          <p:cNvPr id="20" name="vis:tile"/>
+          <p:cNvSpPr/>
+          <p:nvPr/>
+        </p:nvSpPr>
+        <p:spPr>
+          <a:xfrm>
+            <a:off x="4322978" y="1719072"/>
+            <a:ext cx="3545738" cy="2926080"/>
+          </a:xfrm>
+          <a:prstGeom prst="roundRect">
+            <a:avLst>
+              <a:gd name="adj" fmla="val 3125"/>
+            </a:avLst>
+          </a:prstGeom>
+          <a:solidFill>
+            <a:srgbClr val="F3F6FB"/>
+          </a:solidFill>
+          <a:ln>
+            <a:noFill/>
+          </a:ln>
+          <a:effectLst/>
+        </p:spPr>
+        <p:style>
+          <a:lnRef idx="1">
+            <a:schemeClr val="accent1"/>
+          </a:lnRef>
+          <a:fillRef idx="3">
+            <a:schemeClr val="accent1"/>
+          </a:fillRef>
+          <a:effectRef idx="2">
+            <a:schemeClr val="accent1"/>
+          </a:effectRef>
+          <a:fontRef idx="minor">
+            <a:schemeClr val="lt1"/>
+          </a:fontRef>
+        </p:style>
+        <p:txBody>
           <a:bodyPr rtlCol="0" anchor="ctr" wrap="square"/>
           <a:lstStyle/>
           <a:p/>
         </p:txBody>
       </p:sp>
-      <p:cxnSp>
-        <p:nvCxnSpPr>
-          <p:cNvPr id="18" name="vis:icon"/>
-          <p:cNvCxnSpPr/>
-          <p:nvPr/>
-        </p:nvCxnSpPr>
-        <p:spPr>
-          <a:xfrm flipV="1">
-            <a:off x="1106424" y="2251852"/>
-            <a:ext cx="0" cy="89011"/>
-          </a:xfrm>
-          <a:prstGeom prst="line">
-            <a:avLst/>
-          </a:prstGeom>
+      <p:sp>
+        <p:nvSpPr>
+          <p:cNvPr id="21" name="vis:badge"/>
+          <p:cNvSpPr/>
+          <p:nvPr/>
+        </p:nvSpPr>
+        <p:spPr>
+          <a:xfrm>
+            <a:off x="4597298" y="2011679"/>
+            <a:ext cx="658368" cy="658368"/>
+          </a:xfrm>
+          <a:prstGeom prst="roundRect">
+            <a:avLst>
+              <a:gd name="adj" fmla="val 13888"/>
+            </a:avLst>
+          </a:prstGeom>
+          <a:solidFill>
+            <a:srgbClr val="FFFFFF"/>
+          </a:solidFill>
+          <a:ln>
+            <a:noFill/>
+          </a:ln>
+          <a:effectLst/>
+        </p:spPr>
+        <p:style>
+          <a:lnRef idx="1">
+            <a:schemeClr val="accent1"/>
+          </a:lnRef>
+          <a:fillRef idx="3">
+            <a:schemeClr val="accent1"/>
+          </a:fillRef>
+          <a:effectRef idx="2">
+            <a:schemeClr val="accent1"/>
+          </a:effectRef>
+          <a:fontRef idx="minor">
+            <a:schemeClr val="lt1"/>
+          </a:fontRef>
+        </p:style>
+        <p:txBody>
+          <a:bodyPr rtlCol="0" anchor="ctr" wrap="square"/>
+          <a:lstStyle/>
+          <a:p/>
+        </p:txBody>
+      </p:sp>
+      <p:sp>
+        <p:nvSpPr>
+          <p:cNvPr id="22" name="vis:icon"/>
+          <p:cNvSpPr/>
+          <p:nvPr/>
+        </p:nvSpPr>
+        <p:spPr>
+          <a:xfrm>
+            <a:off x="4775847" y="2190229"/>
+            <a:ext cx="301269" cy="301269"/>
+          </a:xfrm>
+          <a:prstGeom prst="ellipse">
+            <a:avLst/>
+          </a:prstGeom>
+          <a:noFill/>
           <a:ln w="19050">
             <a:solidFill>
               <a:srgbClr val="7A1220"/>
@@ -63699,30 +63907,35 @@
           <a:effectLst/>
         </p:spPr>
         <p:style>
-          <a:lnRef idx="2">
-            <a:schemeClr val="accent1"/>
-          </a:lnRef>
-          <a:fillRef idx="0">
-            <a:schemeClr val="accent1"/>
-          </a:fillRef>
-          <a:effectRef idx="1">
-            <a:schemeClr val="accent1"/>
-          </a:effectRef>
-          <a:fontRef idx="minor">
-            <a:schemeClr val="tx1"/>
-          </a:fontRef>
-        </p:style>
-      </p:cxnSp>
+          <a:lnRef idx="1">
+            <a:schemeClr val="accent1"/>
+          </a:lnRef>
+          <a:fillRef idx="3">
+            <a:schemeClr val="accent1"/>
+          </a:fillRef>
+          <a:effectRef idx="2">
+            <a:schemeClr val="accent1"/>
+          </a:effectRef>
+          <a:fontRef idx="minor">
+            <a:schemeClr val="lt1"/>
+          </a:fontRef>
+        </p:style>
+        <p:txBody>
+          <a:bodyPr rtlCol="0" anchor="ctr" wrap="square"/>
+          <a:lstStyle/>
+          <a:p/>
+        </p:txBody>
+      </p:sp>
       <p:cxnSp>
         <p:nvCxnSpPr>
-          <p:cNvPr id="19" name="vis:icon"/>
+          <p:cNvPr id="23" name="vis:icon"/>
           <p:cNvCxnSpPr/>
           <p:nvPr/>
         </p:nvCxnSpPr>
         <p:spPr>
-          <a:xfrm>
-            <a:off x="1106424" y="2340863"/>
-            <a:ext cx="75317" cy="27389"/>
+          <a:xfrm flipV="1">
+            <a:off x="4926482" y="2251852"/>
+            <a:ext cx="0" cy="89011"/>
           </a:xfrm>
           <a:prstGeom prst="line">
             <a:avLst/>
@@ -63749,15 +63962,51 @@
           </a:fontRef>
         </p:style>
       </p:cxnSp>
-      <p:sp>
-        <p:nvSpPr>
-          <p:cNvPr id="20" name="cell:tilelabel"/>
+      <p:cxnSp>
+        <p:nvCxnSpPr>
+          <p:cNvPr id="24" name="vis:icon"/>
+          <p:cNvCxnSpPr/>
+          <p:nvPr/>
+        </p:nvCxnSpPr>
+        <p:spPr>
+          <a:xfrm>
+            <a:off x="4926482" y="2340863"/>
+            <a:ext cx="75317" cy="27389"/>
+          </a:xfrm>
+          <a:prstGeom prst="line">
+            <a:avLst/>
+          </a:prstGeom>
+          <a:ln w="19050">
+            <a:solidFill>
+              <a:srgbClr val="7A1220"/>
+            </a:solidFill>
+          </a:ln>
+          <a:effectLst/>
+        </p:spPr>
+        <p:style>
+          <a:lnRef idx="2">
+            <a:schemeClr val="accent1"/>
+          </a:lnRef>
+          <a:fillRef idx="0">
+            <a:schemeClr val="accent1"/>
+          </a:fillRef>
+          <a:effectRef idx="1">
+            <a:schemeClr val="accent1"/>
+          </a:effectRef>
+          <a:fontRef idx="minor">
+            <a:schemeClr val="tx1"/>
+          </a:fontRef>
+        </p:style>
+      </p:cxnSp>
+      <p:sp>
+        <p:nvSpPr>
+          <p:cNvPr id="25" name="cell:tilelabel"/>
           <p:cNvSpPr txBox="1"/>
           <p:nvPr/>
         </p:nvSpPr>
         <p:spPr>
           <a:xfrm>
-            <a:off x="777240" y="2852928"/>
+            <a:off x="4597298" y="2852928"/>
             <a:ext cx="2997098" cy="566928"/>
           </a:xfrm>
           <a:prstGeom prst="rect">
@@ -63796,13 +64045,13 @@
       </p:sp>
       <p:sp>
         <p:nvSpPr>
-          <p:cNvPr id="21" name="cell:tilesub"/>
+          <p:cNvPr id="26" name="cell:tilesub"/>
           <p:cNvSpPr txBox="1"/>
           <p:nvPr/>
         </p:nvSpPr>
         <p:spPr>
           <a:xfrm>
-            <a:off x="777240" y="3493008"/>
+            <a:off x="4597298" y="3493008"/>
             <a:ext cx="2997098" cy="914400"/>
           </a:xfrm>
           <a:prstGeom prst="rect">
@@ -63834,20 +64083,20 @@
                 </a:solidFill>
                 <a:latin typeface="Segoe UI"/>
               </a:rPr>
-              <a:t>"The director needs this paid before five." The classic combination, and it works.</a:t>
+              <a:t>"The director needs this paid before five." A common combination, and an easy one to notice.</a:t>
             </a:r>
           </a:p>
         </p:txBody>
       </p:sp>
       <p:sp>
         <p:nvSpPr>
-          <p:cNvPr id="22" name="vis:tile"/>
+          <p:cNvPr id="27" name="vis:tile"/>
           <p:cNvSpPr/>
           <p:nvPr/>
         </p:nvSpPr>
         <p:spPr>
           <a:xfrm>
-            <a:off x="4322978" y="1719072"/>
+            <a:off x="8143036" y="1719072"/>
             <a:ext cx="3545738" cy="2926080"/>
           </a:xfrm>
           <a:prstGeom prst="roundRect">
@@ -63885,13 +64134,13 @@
       </p:sp>
       <p:sp>
         <p:nvSpPr>
-          <p:cNvPr id="23" name="vis:badge"/>
+          <p:cNvPr id="28" name="vis:badge"/>
           <p:cNvSpPr/>
           <p:nvPr/>
         </p:nvSpPr>
         <p:spPr>
           <a:xfrm>
-            <a:off x="4597298" y="2011679"/>
+            <a:off x="8417356" y="2011679"/>
             <a:ext cx="658368" cy="658368"/>
           </a:xfrm>
           <a:prstGeom prst="roundRect">
@@ -63929,13 +64178,13 @@
       </p:sp>
       <p:sp>
         <p:nvSpPr>
-          <p:cNvPr id="24" name="vis:icon"/>
+          <p:cNvPr id="29" name="vis:icon"/>
           <p:cNvSpPr/>
           <p:nvPr/>
         </p:nvSpPr>
         <p:spPr>
           <a:xfrm>
-            <a:off x="4803235" y="2320322"/>
+            <a:off x="8623294" y="2320322"/>
             <a:ext cx="246492" cy="171175"/>
           </a:xfrm>
           <a:prstGeom prst="roundRect">
@@ -63973,13 +64222,13 @@
       </p:sp>
       <p:sp>
         <p:nvSpPr>
-          <p:cNvPr id="25" name="vis:icon"/>
+          <p:cNvPr id="30" name="vis:icon"/>
           <p:cNvSpPr/>
           <p:nvPr/>
         </p:nvSpPr>
         <p:spPr>
           <a:xfrm>
-            <a:off x="4847741" y="2203923"/>
+            <a:off x="8667799" y="2203923"/>
             <a:ext cx="157481" cy="212257"/>
           </a:xfrm>
           <a:prstGeom prst="arc">
@@ -64015,13 +64264,13 @@
       </p:sp>
       <p:sp>
         <p:nvSpPr>
-          <p:cNvPr id="26" name="cell:tilelabel"/>
+          <p:cNvPr id="31" name="cell:tilelabel"/>
           <p:cNvSpPr txBox="1"/>
           <p:nvPr/>
         </p:nvSpPr>
         <p:spPr>
           <a:xfrm>
-            <a:off x="4597298" y="2852928"/>
+            <a:off x="8417356" y="2852928"/>
             <a:ext cx="2997098" cy="566928"/>
           </a:xfrm>
           <a:prstGeom prst="rect">
@@ -64060,13 +64309,13 @@
       </p:sp>
       <p:sp>
         <p:nvSpPr>
-          <p:cNvPr id="27" name="cell:tilesub"/>
+          <p:cNvPr id="32" name="cell:tilesub"/>
           <p:cNvSpPr txBox="1"/>
           <p:nvPr/>
         </p:nvSpPr>
         <p:spPr>
           <a:xfrm>
-            <a:off x="4597298" y="3493008"/>
+            <a:off x="8417356" y="3493008"/>
             <a:ext cx="2997098" cy="914400"/>
           </a:xfrm>
           <a:prstGeom prst="rect">
@@ -64099,255 +64348,6 @@
                 <a:latin typeface="Segoe UI"/>
               </a:rPr>
               <a:t>"Do not mention this yet — the new account is confidential." Nothing legitimate needs both.</a:t>
-            </a:r>
-          </a:p>
-        </p:txBody>
-      </p:sp>
-      <p:sp>
-        <p:nvSpPr>
-          <p:cNvPr id="28" name="vis:tile"/>
-          <p:cNvSpPr/>
-          <p:nvPr/>
-        </p:nvSpPr>
-        <p:spPr>
-          <a:xfrm>
-            <a:off x="8143036" y="1719072"/>
-            <a:ext cx="3545738" cy="2926080"/>
-          </a:xfrm>
-          <a:prstGeom prst="roundRect">
-            <a:avLst>
-              <a:gd name="adj" fmla="val 3125"/>
-            </a:avLst>
-          </a:prstGeom>
-          <a:solidFill>
-            <a:srgbClr val="F3F6FB"/>
-          </a:solidFill>
-          <a:ln>
-            <a:noFill/>
-          </a:ln>
-          <a:effectLst/>
-        </p:spPr>
-        <p:style>
-          <a:lnRef idx="1">
-            <a:schemeClr val="accent1"/>
-          </a:lnRef>
-          <a:fillRef idx="3">
-            <a:schemeClr val="accent1"/>
-          </a:fillRef>
-          <a:effectRef idx="2">
-            <a:schemeClr val="accent1"/>
-          </a:effectRef>
-          <a:fontRef idx="minor">
-            <a:schemeClr val="lt1"/>
-          </a:fontRef>
-        </p:style>
-        <p:txBody>
-          <a:bodyPr rtlCol="0" anchor="ctr" wrap="square"/>
-          <a:lstStyle/>
-          <a:p/>
-        </p:txBody>
-      </p:sp>
-      <p:sp>
-        <p:nvSpPr>
-          <p:cNvPr id="29" name="vis:badge"/>
-          <p:cNvSpPr/>
-          <p:nvPr/>
-        </p:nvSpPr>
-        <p:spPr>
-          <a:xfrm>
-            <a:off x="8417356" y="2011679"/>
-            <a:ext cx="658368" cy="658368"/>
-          </a:xfrm>
-          <a:prstGeom prst="roundRect">
-            <a:avLst>
-              <a:gd name="adj" fmla="val 13888"/>
-            </a:avLst>
-          </a:prstGeom>
-          <a:solidFill>
-            <a:srgbClr val="FFFFFF"/>
-          </a:solidFill>
-          <a:ln>
-            <a:noFill/>
-          </a:ln>
-          <a:effectLst/>
-        </p:spPr>
-        <p:style>
-          <a:lnRef idx="1">
-            <a:schemeClr val="accent1"/>
-          </a:lnRef>
-          <a:fillRef idx="3">
-            <a:schemeClr val="accent1"/>
-          </a:fillRef>
-          <a:effectRef idx="2">
-            <a:schemeClr val="accent1"/>
-          </a:effectRef>
-          <a:fontRef idx="minor">
-            <a:schemeClr val="lt1"/>
-          </a:fontRef>
-        </p:style>
-        <p:txBody>
-          <a:bodyPr rtlCol="0" anchor="ctr" wrap="square"/>
-          <a:lstStyle/>
-          <a:p/>
-        </p:txBody>
-      </p:sp>
-      <p:sp>
-        <p:nvSpPr>
-          <p:cNvPr id="30" name="vis:icon"/>
-          <p:cNvSpPr/>
-          <p:nvPr/>
-        </p:nvSpPr>
-        <p:spPr>
-          <a:xfrm>
-            <a:off x="8599329" y="2186805"/>
-            <a:ext cx="294422" cy="308117"/>
-          </a:xfrm>
-          <a:custGeom>
-            <a:avLst/>
-            <a:gdLst/>
-            <a:ahLst/>
-            <a:cxnLst/>
-            <a:rect l="l" t="t" r="r" b="b"/>
-            <a:pathLst>
-              <a:path w="294422" h="308117">
-                <a:moveTo>
-                  <a:pt x="147211" y="0"/>
-                </a:moveTo>
-                <a:lnTo>
-                  <a:pt x="294422" y="65047"/>
-                </a:lnTo>
-                <a:lnTo>
-                  <a:pt x="270458" y="222529"/>
-                </a:lnTo>
-                <a:lnTo>
-                  <a:pt x="147211" y="308117"/>
-                </a:lnTo>
-                <a:lnTo>
-                  <a:pt x="23965" y="222529"/>
-                </a:lnTo>
-                <a:lnTo>
-                  <a:pt x="0" y="65047"/>
-                </a:lnTo>
-                <a:close/>
-              </a:path>
-            </a:pathLst>
-          </a:custGeom>
-          <a:noFill/>
-          <a:ln w="19050">
-            <a:solidFill>
-              <a:srgbClr val="7A1220"/>
-            </a:solidFill>
-          </a:ln>
-          <a:effectLst/>
-        </p:spPr>
-        <p:style>
-          <a:lnRef idx="1">
-            <a:schemeClr val="accent1"/>
-          </a:lnRef>
-          <a:fillRef idx="3">
-            <a:schemeClr val="accent1"/>
-          </a:fillRef>
-          <a:effectRef idx="2">
-            <a:schemeClr val="accent1"/>
-          </a:effectRef>
-          <a:fontRef idx="minor">
-            <a:schemeClr val="lt1"/>
-          </a:fontRef>
-        </p:style>
-        <p:txBody>
-          <a:bodyPr rtlCol="0" anchor="ctr"/>
-          <a:lstStyle/>
-          <a:p>
-            <a:pPr algn="ctr"/>
-          </a:p>
-        </p:txBody>
-      </p:sp>
-      <p:sp>
-        <p:nvSpPr>
-          <p:cNvPr id="31" name="cell:tilelabel"/>
-          <p:cNvSpPr txBox="1"/>
-          <p:nvPr/>
-        </p:nvSpPr>
-        <p:spPr>
-          <a:xfrm>
-            <a:off x="8417356" y="2852928"/>
-            <a:ext cx="2997098" cy="566928"/>
-          </a:xfrm>
-          <a:prstGeom prst="rect">
-            <a:avLst/>
-          </a:prstGeom>
-          <a:noFill/>
-        </p:spPr>
-        <p:txBody>
-          <a:bodyPr wrap="square" lIns="0" rIns="0" tIns="0" bIns="0" anchor="t">
-            <a:spAutoFit/>
-          </a:bodyPr>
-          <a:lstStyle/>
-          <a:p>
-            <a:pPr algn="l">
-              <a:lnSpc>
-                <a:spcPts val="2210"/>
-              </a:lnSpc>
-              <a:spcBef>
-                <a:spcPts val="0"/>
-              </a:spcBef>
-              <a:spcAft>
-                <a:spcPts val="0"/>
-              </a:spcAft>
-            </a:pPr>
-            <a:r>
-              <a:rPr sz="1700" b="0">
-                <a:solidFill>
-                  <a:srgbClr val="101826"/>
-                </a:solidFill>
-                <a:latin typeface="Segoe UI Semibold"/>
-              </a:rPr>
-              <a:t>Any two means verify</a:t>
-            </a:r>
-          </a:p>
-        </p:txBody>
-      </p:sp>
-      <p:sp>
-        <p:nvSpPr>
-          <p:cNvPr id="32" name="cell:tilesub"/>
-          <p:cNvSpPr txBox="1"/>
-          <p:nvPr/>
-        </p:nvSpPr>
-        <p:spPr>
-          <a:xfrm>
-            <a:off x="8417356" y="3493008"/>
-            <a:ext cx="2997098" cy="914400"/>
-          </a:xfrm>
-          <a:prstGeom prst="rect">
-            <a:avLst/>
-          </a:prstGeom>
-          <a:noFill/>
-        </p:spPr>
-        <p:txBody>
-          <a:bodyPr wrap="square" lIns="0" rIns="0" tIns="0" bIns="0" anchor="t">
-            <a:spAutoFit/>
-          </a:bodyPr>
-          <a:lstStyle/>
-          <a:p>
-            <a:pPr algn="l">
-              <a:lnSpc>
-                <a:spcPts val="1690"/>
-              </a:lnSpc>
-              <a:spcBef>
-                <a:spcPts val="0"/>
-              </a:spcBef>
-              <a:spcAft>
-                <a:spcPts val="0"/>
-              </a:spcAft>
-            </a:pPr>
-            <a:r>
-              <a:rPr sz="1300" b="0">
-                <a:solidFill>
-                  <a:srgbClr val="5B6779"/>
-                </a:solidFill>
-                <a:latin typeface="Segoe UI"/>
-              </a:rPr>
-              <a:t>Not "look harder at the email". Pick up a phone and use a number you already had.</a:t>
             </a:r>
           </a:p>
         </p:txBody>

--- a/output/05-security-privacy/05-02-phishing-and-social-engineering.pptx
+++ b/output/05-security-privacy/05-02-phishing-and-social-engineering.pptx
@@ -27885,7 +27885,7 @@
           <a:p>
             <a:pPr algn="l">
               <a:lnSpc>
-                <a:spcPts val="4420"/>
+                <a:spcPts val="3770"/>
               </a:lnSpc>
               <a:spcBef>
                 <a:spcPts val="0"/>
@@ -27895,13 +27895,13 @@
               </a:spcAft>
             </a:pPr>
             <a:r>
-              <a:rPr sz="3400" b="0">
+              <a:rPr sz="2900" b="0">
                 <a:solidFill>
                   <a:srgbClr val="101826"/>
                 </a:solidFill>
                 <a:latin typeface="Segoe UI Semibold"/>
               </a:rPr>
-              <a:t>Which combination should stop you?</a:t>
+              <a:t>Which of these is reason enough to verify, on its own?</a:t>
             </a:r>
           </a:p>
         </p:txBody>
@@ -28532,7 +28532,7 @@
                 </a:solidFill>
                 <a:latin typeface="Segoe UI"/>
               </a:rPr>
-              <a:t>Urgency and a request to keep it quiet</a:t>
+              <a:t>A request to change bank details or payment instructions</a:t>
             </a:r>
           </a:p>
         </p:txBody>
@@ -29294,7 +29294,7 @@
                 </a:solidFill>
                 <a:latin typeface="Segoe UI Semibold"/>
               </a:rPr>
-              <a:t>YOU CHOSE  A.  Urgency and a request to keep it quiet</a:t>
+              <a:t>YOU CHOSE  A.  A request to change bank details or payment instructions</a:t>
             </a:r>
           </a:p>
         </p:txBody>
@@ -29339,7 +29339,7 @@
                 </a:solidFill>
                 <a:latin typeface="Segoe UI"/>
               </a:rPr>
-              <a:t>Nothing legitimate needs both speed and secrecy. That pairing exists specifically to stop you checking with the colleague who would recognise it as false.</a:t>
+              <a:t>A change is reason enough by itself. It does not need urgency or secrecy attached to it — waiting for a second signal before verifying is exactly the gap this kind of attack is built to use.</a:t>
             </a:r>
           </a:p>
         </p:txBody>
@@ -29473,7 +29473,7 @@
                 </a:solidFill>
                 <a:latin typeface="Segoe UI"/>
               </a:rPr>
-              <a:t>Signals combine easily — but one alone is reason enough to check.</a:t>
+              <a:t>A change to where money or data goes — no second signal needed.</a:t>
             </a:r>
           </a:p>
         </p:txBody>
@@ -32116,7 +32116,7 @@
                 </a:solidFill>
                 <a:latin typeface="Segoe UI"/>
               </a:rPr>
-              <a:t>Signals combine easily — but one alone is reason enough to check.</a:t>
+              <a:t>A change to where money or data goes — no second signal needed.</a:t>
             </a:r>
           </a:p>
         </p:txBody>
@@ -32889,7 +32889,7 @@
                 </a:solidFill>
                 <a:latin typeface="Segoe UI"/>
               </a:rPr>
-              <a:t>Timing alone is not a signal, although attacks do favour busy periods. It matters only alongside the actual pressure signals.</a:t>
+              <a:t>Timing alone is not a signal, although attacks do favour busy periods. It matters only alongside an actual pressure signal such as a change.</a:t>
             </a:r>
           </a:p>
         </p:txBody>
@@ -33023,7 +33023,7 @@
                 </a:solidFill>
                 <a:latin typeface="Segoe UI"/>
               </a:rPr>
-              <a:t>Signals combine easily — but one alone is reason enough to check.</a:t>
+              <a:t>A change to where money or data goes — no second signal needed.</a:t>
             </a:r>
           </a:p>
         </p:txBody>
@@ -33930,7 +33930,7 @@
                 </a:solidFill>
                 <a:latin typeface="Segoe UI"/>
               </a:rPr>
-              <a:t>Signals combine easily — but one alone is reason enough to check.</a:t>
+              <a:t>A change to where money or data goes — no second signal needed.</a:t>
             </a:r>
           </a:p>
         </p:txBody>
@@ -55209,7 +55209,7 @@
                 </a:solidFill>
                 <a:latin typeface="Segoe UI"/>
               </a:rPr>
-              <a:t>Urgency, authority, secrecy, a change. Count them.</a:t>
+              <a:t>Urgency, authority, secrecy, a change. Any one alone is reason enough.</a:t>
             </a:r>
           </a:p>
         </p:txBody>
